--- a/Reporte 150726.pptx
+++ b/Reporte 150726.pptx
@@ -7245,10 +7245,10 @@
       </p:sp>
       <p:pic>
         <p:nvPicPr>
-          <p:cNvPr id="4" name="Imagen 3">
+          <p:cNvPr id="3" name="Imagen 2">
             <a:extLst>
               <a:ext uri="{FF2B5EF4-FFF2-40B4-BE49-F238E27FC236}">
-                <a16:creationId xmlns:a16="http://schemas.microsoft.com/office/drawing/2014/main" id="{9E010DB7-DAAD-E6E5-348C-62F1BC751AF6}"/>
+                <a16:creationId xmlns:a16="http://schemas.microsoft.com/office/drawing/2014/main" id="{8F8741E3-E39C-4206-3B0E-3BE20A43241C}"/>
               </a:ext>
             </a:extLst>
           </p:cNvPr>
@@ -7265,8 +7265,8 @@
         </p:blipFill>
         <p:spPr>
           <a:xfrm>
-            <a:off x="0" y="937955"/>
-            <a:ext cx="9144000" cy="3410465"/>
+            <a:off x="0" y="901238"/>
+            <a:ext cx="9144000" cy="3483899"/>
           </a:xfrm>
           <a:prstGeom prst="rect">
             <a:avLst/>
@@ -7359,10 +7359,10 @@
       </p:sp>
       <p:pic>
         <p:nvPicPr>
-          <p:cNvPr id="4" name="Imagen 3">
+          <p:cNvPr id="3" name="Imagen 2">
             <a:extLst>
               <a:ext uri="{FF2B5EF4-FFF2-40B4-BE49-F238E27FC236}">
-                <a16:creationId xmlns:a16="http://schemas.microsoft.com/office/drawing/2014/main" id="{B670C51F-18B2-A1F4-D5F7-5D024952B010}"/>
+                <a16:creationId xmlns:a16="http://schemas.microsoft.com/office/drawing/2014/main" id="{391372E2-1FFE-721B-70E3-794B83A255C1}"/>
               </a:ext>
             </a:extLst>
           </p:cNvPr>
@@ -7379,8 +7379,8 @@
         </p:blipFill>
         <p:spPr>
           <a:xfrm>
-            <a:off x="0" y="1418011"/>
-            <a:ext cx="9144000" cy="2450353"/>
+            <a:off x="0" y="1342159"/>
+            <a:ext cx="9144000" cy="2459182"/>
           </a:xfrm>
           <a:prstGeom prst="rect">
             <a:avLst/>
@@ -7473,10 +7473,10 @@
       </p:sp>
       <p:pic>
         <p:nvPicPr>
-          <p:cNvPr id="3" name="Imagen 2">
+          <p:cNvPr id="2" name="Imagen 1">
             <a:extLst>
               <a:ext uri="{FF2B5EF4-FFF2-40B4-BE49-F238E27FC236}">
-                <a16:creationId xmlns:a16="http://schemas.microsoft.com/office/drawing/2014/main" id="{24790104-594D-739F-18E5-CDB919E0ECB7}"/>
+                <a16:creationId xmlns:a16="http://schemas.microsoft.com/office/drawing/2014/main" id="{2E19906D-15EA-3E4B-DE5A-4A5897B85C10}"/>
               </a:ext>
             </a:extLst>
           </p:cNvPr>
@@ -7493,8 +7493,8 @@
         </p:blipFill>
         <p:spPr>
           <a:xfrm>
-            <a:off x="1106488" y="914940"/>
-            <a:ext cx="6858000" cy="3456495"/>
+            <a:off x="468257" y="574864"/>
+            <a:ext cx="8207485" cy="4136648"/>
           </a:xfrm>
           <a:prstGeom prst="rect">
             <a:avLst/>
@@ -7583,10 +7583,10 @@
       </p:sp>
       <p:pic>
         <p:nvPicPr>
-          <p:cNvPr id="3" name="Imagen 2">
+          <p:cNvPr id="4" name="Imagen 3">
             <a:extLst>
               <a:ext uri="{FF2B5EF4-FFF2-40B4-BE49-F238E27FC236}">
-                <a16:creationId xmlns:a16="http://schemas.microsoft.com/office/drawing/2014/main" id="{C9B761C1-CD9C-8EF4-9538-37BAAF50B1D3}"/>
+                <a16:creationId xmlns:a16="http://schemas.microsoft.com/office/drawing/2014/main" id="{D826A99A-32FC-B492-F837-516A284E6932}"/>
               </a:ext>
             </a:extLst>
           </p:cNvPr>
@@ -7603,8 +7603,8 @@
         </p:blipFill>
         <p:spPr>
           <a:xfrm>
-            <a:off x="0" y="1196877"/>
-            <a:ext cx="9144000" cy="3037746"/>
+            <a:off x="0" y="1153115"/>
+            <a:ext cx="9144000" cy="2980146"/>
           </a:xfrm>
           <a:prstGeom prst="rect">
             <a:avLst/>
@@ -7697,10 +7697,10 @@
       </p:sp>
       <p:pic>
         <p:nvPicPr>
-          <p:cNvPr id="3" name="Imagen 2">
+          <p:cNvPr id="4" name="Imagen 3">
             <a:extLst>
               <a:ext uri="{FF2B5EF4-FFF2-40B4-BE49-F238E27FC236}">
-                <a16:creationId xmlns:a16="http://schemas.microsoft.com/office/drawing/2014/main" id="{173CA884-A958-56FE-8906-B58E45267877}"/>
+                <a16:creationId xmlns:a16="http://schemas.microsoft.com/office/drawing/2014/main" id="{D8F9BE56-D19F-F48C-E647-40E90BBE1721}"/>
               </a:ext>
             </a:extLst>
           </p:cNvPr>
@@ -7717,8 +7717,8 @@
         </p:blipFill>
         <p:spPr>
           <a:xfrm>
-            <a:off x="0" y="946287"/>
-            <a:ext cx="9144000" cy="3393802"/>
+            <a:off x="0" y="912839"/>
+            <a:ext cx="9144000" cy="3460698"/>
           </a:xfrm>
           <a:prstGeom prst="rect">
             <a:avLst/>
@@ -7811,10 +7811,10 @@
       </p:sp>
       <p:pic>
         <p:nvPicPr>
-          <p:cNvPr id="3" name="Imagen 2">
+          <p:cNvPr id="2" name="Imagen 1">
             <a:extLst>
               <a:ext uri="{FF2B5EF4-FFF2-40B4-BE49-F238E27FC236}">
-                <a16:creationId xmlns:a16="http://schemas.microsoft.com/office/drawing/2014/main" id="{EF62C777-B11D-C724-18AD-7659A14B5DEE}"/>
+                <a16:creationId xmlns:a16="http://schemas.microsoft.com/office/drawing/2014/main" id="{29A3F298-0A70-E067-F779-A537E3FC4C2D}"/>
               </a:ext>
             </a:extLst>
           </p:cNvPr>
@@ -7831,7 +7831,7 @@
         </p:blipFill>
         <p:spPr>
           <a:xfrm>
-            <a:off x="1143000" y="914940"/>
+            <a:off x="1106488" y="914940"/>
             <a:ext cx="6858000" cy="3456495"/>
           </a:xfrm>
           <a:prstGeom prst="rect">
@@ -7925,10 +7925,10 @@
       </p:sp>
       <p:pic>
         <p:nvPicPr>
-          <p:cNvPr id="3" name="Imagen 2">
+          <p:cNvPr id="2" name="Imagen 1">
             <a:extLst>
               <a:ext uri="{FF2B5EF4-FFF2-40B4-BE49-F238E27FC236}">
-                <a16:creationId xmlns:a16="http://schemas.microsoft.com/office/drawing/2014/main" id="{B94AF0DD-441F-1044-19A4-3A880E13C43B}"/>
+                <a16:creationId xmlns:a16="http://schemas.microsoft.com/office/drawing/2014/main" id="{6426806D-833B-145D-9E67-83AB1883FD40}"/>
               </a:ext>
             </a:extLst>
           </p:cNvPr>
@@ -7945,8 +7945,8 @@
         </p:blipFill>
         <p:spPr>
           <a:xfrm>
-            <a:off x="1050373" y="886658"/>
-            <a:ext cx="6970230" cy="3513060"/>
+            <a:off x="570732" y="644914"/>
+            <a:ext cx="7929512" cy="3996547"/>
           </a:xfrm>
           <a:prstGeom prst="rect">
             <a:avLst/>
@@ -8035,10 +8035,10 @@
       </p:sp>
       <p:pic>
         <p:nvPicPr>
-          <p:cNvPr id="3" name="Imagen 2">
+          <p:cNvPr id="4" name="Imagen 3">
             <a:extLst>
               <a:ext uri="{FF2B5EF4-FFF2-40B4-BE49-F238E27FC236}">
-                <a16:creationId xmlns:a16="http://schemas.microsoft.com/office/drawing/2014/main" id="{69CB98DA-790A-EFA0-C903-2E20301E0D11}"/>
+                <a16:creationId xmlns:a16="http://schemas.microsoft.com/office/drawing/2014/main" id="{CF59EF23-A4CB-640D-31A1-75EE2FE608A0}"/>
               </a:ext>
             </a:extLst>
           </p:cNvPr>
@@ -8055,8 +8055,8 @@
         </p:blipFill>
         <p:spPr>
           <a:xfrm>
-            <a:off x="558245" y="899869"/>
-            <a:ext cx="7954485" cy="3486637"/>
+            <a:off x="0" y="1057771"/>
+            <a:ext cx="9144000" cy="3170834"/>
           </a:xfrm>
           <a:prstGeom prst="rect">
             <a:avLst/>

--- a/Reporte 150726.pptx
+++ b/Reporte 150726.pptx
@@ -6575,10 +6575,10 @@
       </p:sp>
       <p:pic>
         <p:nvPicPr>
-          <p:cNvPr id="4" name="Imagen 3">
+          <p:cNvPr id="5" name="Imagen 4">
             <a:extLst>
               <a:ext uri="{FF2B5EF4-FFF2-40B4-BE49-F238E27FC236}">
-                <a16:creationId xmlns:a16="http://schemas.microsoft.com/office/drawing/2014/main" id="{D3D84AA7-CD3E-E8B2-E97D-B4708A48EBBC}"/>
+                <a16:creationId xmlns:a16="http://schemas.microsoft.com/office/drawing/2014/main" id="{AFBF80C4-119F-1E35-A70F-08F2097E9F89}"/>
               </a:ext>
             </a:extLst>
           </p:cNvPr>
@@ -6595,8 +6595,8 @@
         </p:blipFill>
         <p:spPr>
           <a:xfrm>
-            <a:off x="0" y="940092"/>
-            <a:ext cx="9144000" cy="3406191"/>
+            <a:off x="0" y="852173"/>
+            <a:ext cx="9144000" cy="3582030"/>
           </a:xfrm>
           <a:prstGeom prst="rect">
             <a:avLst/>
@@ -6673,10 +6673,10 @@
       </p:sp>
       <p:pic>
         <p:nvPicPr>
-          <p:cNvPr id="4" name="Imagen 3">
+          <p:cNvPr id="3" name="Imagen 2">
             <a:extLst>
               <a:ext uri="{FF2B5EF4-FFF2-40B4-BE49-F238E27FC236}">
-                <a16:creationId xmlns:a16="http://schemas.microsoft.com/office/drawing/2014/main" id="{A3722C2C-342E-79CB-E7F4-AF1C0760B29F}"/>
+                <a16:creationId xmlns:a16="http://schemas.microsoft.com/office/drawing/2014/main" id="{3E6EED79-E635-B253-9CE1-F345FA8B2FC1}"/>
               </a:ext>
             </a:extLst>
           </p:cNvPr>
@@ -6693,8 +6693,8 @@
         </p:blipFill>
         <p:spPr>
           <a:xfrm>
-            <a:off x="0" y="1350714"/>
-            <a:ext cx="9144000" cy="2584948"/>
+            <a:off x="0" y="1324244"/>
+            <a:ext cx="9144000" cy="2637887"/>
           </a:xfrm>
           <a:prstGeom prst="rect">
             <a:avLst/>
@@ -6777,10 +6777,10 @@
       </p:sp>
       <p:pic>
         <p:nvPicPr>
-          <p:cNvPr id="4" name="Imagen 3">
+          <p:cNvPr id="3" name="Imagen 2">
             <a:extLst>
               <a:ext uri="{FF2B5EF4-FFF2-40B4-BE49-F238E27FC236}">
-                <a16:creationId xmlns:a16="http://schemas.microsoft.com/office/drawing/2014/main" id="{2B274B34-0B12-FAD9-3E8F-A9BB1858BDFD}"/>
+                <a16:creationId xmlns:a16="http://schemas.microsoft.com/office/drawing/2014/main" id="{EE7E234C-BFAC-40E5-B1CC-F4199F078085}"/>
               </a:ext>
             </a:extLst>
           </p:cNvPr>
@@ -6797,8 +6797,8 @@
         </p:blipFill>
         <p:spPr>
           <a:xfrm>
-            <a:off x="-6725" y="799639"/>
-            <a:ext cx="9144000" cy="3687097"/>
+            <a:off x="0" y="715317"/>
+            <a:ext cx="9144000" cy="3855742"/>
           </a:xfrm>
           <a:prstGeom prst="rect">
             <a:avLst/>
@@ -6875,10 +6875,10 @@
       </p:sp>
       <p:pic>
         <p:nvPicPr>
-          <p:cNvPr id="4" name="Imagen 3">
+          <p:cNvPr id="5" name="Imagen 4">
             <a:extLst>
               <a:ext uri="{FF2B5EF4-FFF2-40B4-BE49-F238E27FC236}">
-                <a16:creationId xmlns:a16="http://schemas.microsoft.com/office/drawing/2014/main" id="{191E4494-07FC-468F-3CF3-15531E7CA351}"/>
+                <a16:creationId xmlns:a16="http://schemas.microsoft.com/office/drawing/2014/main" id="{FEC255DB-1623-E493-BE55-1608544106A4}"/>
               </a:ext>
             </a:extLst>
           </p:cNvPr>
@@ -6895,8 +6895,8 @@
         </p:blipFill>
         <p:spPr>
           <a:xfrm>
-            <a:off x="-6725" y="1250494"/>
-            <a:ext cx="9144000" cy="2785388"/>
+            <a:off x="0" y="1268533"/>
+            <a:ext cx="9144000" cy="2749310"/>
           </a:xfrm>
           <a:prstGeom prst="rect">
             <a:avLst/>
@@ -6973,10 +6973,10 @@
       </p:sp>
       <p:pic>
         <p:nvPicPr>
-          <p:cNvPr id="4" name="Imagen 3">
+          <p:cNvPr id="3" name="Imagen 2">
             <a:extLst>
               <a:ext uri="{FF2B5EF4-FFF2-40B4-BE49-F238E27FC236}">
-                <a16:creationId xmlns:a16="http://schemas.microsoft.com/office/drawing/2014/main" id="{D42434C2-98FE-BB58-D502-164BBC3D346D}"/>
+                <a16:creationId xmlns:a16="http://schemas.microsoft.com/office/drawing/2014/main" id="{FAA31499-0AD4-11C8-00E1-3AF85838A965}"/>
               </a:ext>
             </a:extLst>
           </p:cNvPr>
@@ -6993,8 +6993,8 @@
         </p:blipFill>
         <p:spPr>
           <a:xfrm>
-            <a:off x="0" y="1570245"/>
-            <a:ext cx="9144000" cy="2145886"/>
+            <a:off x="0" y="575082"/>
+            <a:ext cx="9144000" cy="4136211"/>
           </a:xfrm>
           <a:prstGeom prst="rect">
             <a:avLst/>
@@ -7071,10 +7071,10 @@
       </p:sp>
       <p:pic>
         <p:nvPicPr>
-          <p:cNvPr id="4" name="Imagen 3">
+          <p:cNvPr id="3" name="Imagen 2">
             <a:extLst>
               <a:ext uri="{FF2B5EF4-FFF2-40B4-BE49-F238E27FC236}">
-                <a16:creationId xmlns:a16="http://schemas.microsoft.com/office/drawing/2014/main" id="{36D37052-4DFB-7570-9F3B-6A00B38D8F6F}"/>
+                <a16:creationId xmlns:a16="http://schemas.microsoft.com/office/drawing/2014/main" id="{8C6B1847-18EC-BF54-9C6D-8C55415D1B96}"/>
               </a:ext>
             </a:extLst>
           </p:cNvPr>
@@ -7091,8 +7091,8 @@
         </p:blipFill>
         <p:spPr>
           <a:xfrm>
-            <a:off x="3001749" y="837948"/>
-            <a:ext cx="3067478" cy="3610479"/>
+            <a:off x="424877" y="347342"/>
+            <a:ext cx="8221222" cy="4591691"/>
           </a:xfrm>
           <a:prstGeom prst="rect">
             <a:avLst/>
